--- a/AdaptiveEcosystem/Docs/Roadmap/M3/Presentation/[겜캡디]10-02_장원준.pptx
+++ b/AdaptiveEcosystem/Docs/Roadmap/M3/Presentation/[겜캡디]10-02_장원준.pptx
@@ -113,6 +113,11 @@
       </a:defRPr>
     </a:lvl9pPr>
   </p:defaultTextStyle>
+  <p:extLst>
+    <p:ext uri="{EFAFB233-063F-42B5-8137-9DF3F51BA10A}">
+      <p15:sldGuideLst xmlns:p15="http://schemas.microsoft.com/office/powerpoint/2012/main"/>
+    </p:ext>
+  </p:extLst>
 </p:presentation>
 </file>
 
@@ -7250,16 +7255,68 @@
               </a:defRPr>
             </a:pPr>
             <a:r>
-              <a:rPr sz="2400" b="0">
-                <a:solidFill>
-                  <a:srgbClr val="070707"/>
-                </a:solidFill>
-                <a:latin typeface="Malgun Gothic"/>
-                <a:ea typeface="Malgun Gothic"/>
-                <a:cs typeface="Malgun Gothic"/>
-              </a:rPr>
-              <a:t>Food · Spawn 예약 · 상한</a:t>
-            </a:r>
+              <a:rPr lang="en-US" sz="2400" b="0" dirty="0">
+                <a:solidFill>
+                  <a:srgbClr val="070707"/>
+                </a:solidFill>
+                <a:latin typeface="Malgun Gothic"/>
+                <a:ea typeface="Malgun Gothic"/>
+                <a:cs typeface="Malgun Gothic"/>
+              </a:rPr>
+              <a:t>Resource</a:t>
+            </a:r>
+            <a:r>
+              <a:rPr sz="2400" b="0" dirty="0">
+                <a:solidFill>
+                  <a:srgbClr val="070707"/>
+                </a:solidFill>
+                <a:latin typeface="Malgun Gothic"/>
+                <a:ea typeface="Malgun Gothic"/>
+                <a:cs typeface="Malgun Gothic"/>
+              </a:rPr>
+              <a:t> · Spawn </a:t>
+            </a:r>
+            <a:r>
+              <a:rPr sz="2400" b="0" dirty="0" err="1">
+                <a:solidFill>
+                  <a:srgbClr val="070707"/>
+                </a:solidFill>
+                <a:latin typeface="Malgun Gothic"/>
+                <a:ea typeface="Malgun Gothic"/>
+                <a:cs typeface="Malgun Gothic"/>
+              </a:rPr>
+              <a:t>예약</a:t>
+            </a:r>
+            <a:r>
+              <a:rPr sz="2400" b="0" dirty="0">
+                <a:solidFill>
+                  <a:srgbClr val="070707"/>
+                </a:solidFill>
+                <a:latin typeface="Malgun Gothic"/>
+                <a:ea typeface="Malgun Gothic"/>
+                <a:cs typeface="Malgun Gothic"/>
+              </a:rPr>
+              <a:t> · </a:t>
+            </a:r>
+            <a:r>
+              <a:rPr sz="2400" b="0" dirty="0" err="1">
+                <a:solidFill>
+                  <a:srgbClr val="070707"/>
+                </a:solidFill>
+                <a:latin typeface="Malgun Gothic"/>
+                <a:ea typeface="Malgun Gothic"/>
+                <a:cs typeface="Malgun Gothic"/>
+              </a:rPr>
+              <a:t>상한</a:t>
+            </a:r>
+            <a:endParaRPr sz="2400" b="0" dirty="0">
+              <a:solidFill>
+                <a:srgbClr val="070707"/>
+              </a:solidFill>
+              <a:latin typeface="Malgun Gothic"/>
+              <a:ea typeface="Malgun Gothic"/>
+              <a:cs typeface="Malgun Gothic"/>
+            </a:endParaRPr>
           </a:p>
         </p:txBody>
       </p:sp>
@@ -8129,7 +8186,7 @@
           <a:bodyPr/>
           <a:lstStyle/>
           <a:p>
-            <a:endParaRPr lang="ko-KR" altLang="en-US"/>
+            <a:endParaRPr lang="ko-KR" altLang="en-US" dirty="0"/>
           </a:p>
         </p:txBody>
       </p:sp>
@@ -8557,16 +8614,35 @@
               </a:defRPr>
             </a:pPr>
             <a:r>
-              <a:rPr sz="2325" b="0">
-                <a:solidFill>
-                  <a:srgbClr val="070707"/>
-                </a:solidFill>
-                <a:latin typeface="Malgun Gothic"/>
-                <a:ea typeface="Malgun Gothic"/>
-                <a:cs typeface="Malgun Gothic"/>
-              </a:rPr>
-              <a:t>24</a:t>
-            </a:r>
+              <a:rPr sz="2325" b="0" dirty="0">
+                <a:solidFill>
+                  <a:srgbClr val="070707"/>
+                </a:solidFill>
+                <a:latin typeface="Malgun Gothic"/>
+                <a:ea typeface="Malgun Gothic"/>
+                <a:cs typeface="Malgun Gothic"/>
+              </a:rPr>
+              <a:t>2</a:t>
+            </a:r>
+            <a:r>
+              <a:rPr lang="en-US" sz="2325" b="0" dirty="0">
+                <a:solidFill>
+                  <a:srgbClr val="070707"/>
+                </a:solidFill>
+                <a:latin typeface="Malgun Gothic"/>
+                <a:ea typeface="Malgun Gothic"/>
+                <a:cs typeface="Malgun Gothic"/>
+              </a:rPr>
+              <a:t>2</a:t>
+            </a:r>
+            <a:endParaRPr sz="2325" b="0" dirty="0">
+              <a:solidFill>
+                <a:srgbClr val="070707"/>
+              </a:solidFill>
+              <a:latin typeface="Malgun Gothic"/>
+              <a:ea typeface="Malgun Gothic"/>
+              <a:cs typeface="Malgun Gothic"/>
+            </a:endParaRPr>
           </a:p>
         </p:txBody>
       </p:sp>
@@ -8709,16 +8785,24 @@
               </a:defRPr>
             </a:pPr>
             <a:r>
-              <a:rPr sz="2325" b="0">
-                <a:solidFill>
-                  <a:srgbClr val="070707"/>
-                </a:solidFill>
-                <a:latin typeface="Malgun Gothic"/>
-                <a:ea typeface="Malgun Gothic"/>
-                <a:cs typeface="Malgun Gothic"/>
-              </a:rPr>
-              <a:t>40</a:t>
-            </a:r>
+              <a:rPr lang="en-US" sz="2325" dirty="0">
+                <a:solidFill>
+                  <a:srgbClr val="070707"/>
+                </a:solidFill>
+                <a:latin typeface="Malgun Gothic"/>
+                <a:ea typeface="Malgun Gothic"/>
+                <a:cs typeface="Malgun Gothic"/>
+              </a:rPr>
+              <a:t>36</a:t>
+            </a:r>
+            <a:endParaRPr sz="2325" b="0" dirty="0">
+              <a:solidFill>
+                <a:srgbClr val="070707"/>
+              </a:solidFill>
+              <a:latin typeface="Malgun Gothic"/>
+              <a:ea typeface="Malgun Gothic"/>
+              <a:cs typeface="Malgun Gothic"/>
+            </a:endParaRPr>
           </a:p>
         </p:txBody>
       </p:sp>
@@ -8861,16 +8945,35 @@
               </a:defRPr>
             </a:pPr>
             <a:r>
-              <a:rPr sz="2325" b="0">
-                <a:solidFill>
-                  <a:srgbClr val="070707"/>
-                </a:solidFill>
-                <a:latin typeface="Malgun Gothic"/>
-                <a:ea typeface="Malgun Gothic"/>
-                <a:cs typeface="Malgun Gothic"/>
-              </a:rPr>
-              <a:t>56</a:t>
-            </a:r>
+              <a:rPr sz="2325" b="0" dirty="0">
+                <a:solidFill>
+                  <a:srgbClr val="070707"/>
+                </a:solidFill>
+                <a:latin typeface="Malgun Gothic"/>
+                <a:ea typeface="Malgun Gothic"/>
+                <a:cs typeface="Malgun Gothic"/>
+              </a:rPr>
+              <a:t>5</a:t>
+            </a:r>
+            <a:r>
+              <a:rPr lang="en-US" sz="2325" b="0" dirty="0">
+                <a:solidFill>
+                  <a:srgbClr val="070707"/>
+                </a:solidFill>
+                <a:latin typeface="Malgun Gothic"/>
+                <a:ea typeface="Malgun Gothic"/>
+                <a:cs typeface="Malgun Gothic"/>
+              </a:rPr>
+              <a:t>0</a:t>
+            </a:r>
+            <a:endParaRPr sz="2325" b="0" dirty="0">
+              <a:solidFill>
+                <a:srgbClr val="070707"/>
+              </a:solidFill>
+              <a:latin typeface="Malgun Gothic"/>
+              <a:ea typeface="Malgun Gothic"/>
+              <a:cs typeface="Malgun Gothic"/>
+            </a:endParaRPr>
           </a:p>
         </p:txBody>
       </p:sp>
@@ -9327,7 +9430,40 @@
                 <a:ea typeface="Malgun Gothic"/>
                 <a:cs typeface="Malgun Gothic"/>
               </a:rPr>
-              <a:t>+4초 · +8초에 6개씩</a:t>
+              <a:t>+</a:t>
+            </a:r>
+            <a:r>
+              <a:rPr lang="en-US" sz="2625" dirty="0">
+                <a:solidFill>
+                  <a:srgbClr val="070707"/>
+                </a:solidFill>
+                <a:latin typeface="Malgun Gothic"/>
+                <a:ea typeface="Malgun Gothic"/>
+                <a:cs typeface="Malgun Gothic"/>
+              </a:rPr>
+              <a:t>6</a:t>
+            </a:r>
+            <a:r>
+              <a:rPr lang="ko-KR" altLang="en-US" sz="2625" dirty="0">
+                <a:solidFill>
+                  <a:srgbClr val="070707"/>
+                </a:solidFill>
+                <a:latin typeface="Malgun Gothic"/>
+                <a:ea typeface="Malgun Gothic"/>
+                <a:cs typeface="Malgun Gothic"/>
+              </a:rPr>
+              <a:t>초</a:t>
+            </a:r>
+            <a:r>
+              <a:rPr sz="2625" b="0" dirty="0">
+                <a:solidFill>
+                  <a:srgbClr val="070707"/>
+                </a:solidFill>
+                <a:latin typeface="Malgun Gothic"/>
+                <a:ea typeface="Malgun Gothic"/>
+                <a:cs typeface="Malgun Gothic"/>
+              </a:rPr>
+              <a:t>에 6개</a:t>
             </a:r>
           </a:p>
         </p:txBody>
@@ -11679,6 +11815,17 @@
               </a:defRPr>
             </a:pPr>
             <a:r>
+              <a:rPr sz="2400" b="0" dirty="0" err="1">
+                <a:solidFill>
+                  <a:srgbClr val="070707"/>
+                </a:solidFill>
+                <a:latin typeface="Malgun Gothic"/>
+                <a:ea typeface="Malgun Gothic"/>
+                <a:cs typeface="Malgun Gothic"/>
+              </a:rPr>
+              <a:t>Forest_A</a:t>
+            </a:r>
+            <a:r>
               <a:rPr sz="2400" b="0">
                 <a:solidFill>
                   <a:srgbClr val="070707"/>
@@ -11687,7 +11834,29 @@
                 <a:ea typeface="Malgun Gothic"/>
                 <a:cs typeface="Malgun Gothic"/>
               </a:rPr>
-              <a:t>Forest_A Food = 0</a:t>
+              <a:t> </a:t>
+            </a:r>
+            <a:r>
+              <a:rPr lang="en-US" sz="2400">
+                <a:solidFill>
+                  <a:srgbClr val="070707"/>
+                </a:solidFill>
+                <a:latin typeface="Malgun Gothic"/>
+                <a:ea typeface="Malgun Gothic"/>
+                <a:cs typeface="Malgun Gothic"/>
+              </a:rPr>
+              <a:t>Resource</a:t>
+            </a:r>
+            <a:r>
+              <a:rPr sz="2400" b="0">
+                <a:solidFill>
+                  <a:srgbClr val="070707"/>
+                </a:solidFill>
+                <a:latin typeface="Malgun Gothic"/>
+                <a:ea typeface="Malgun Gothic"/>
+                <a:cs typeface="Malgun Gothic"/>
+              </a:rPr>
+              <a:t> = 0</a:t>
             </a:r>
           </a:p>
         </p:txBody>
